--- a/docs/presentation/Course_Notes_RAG_Demo.pptx
+++ b/docs/presentation/Course_Notes_RAG_Demo.pptx
@@ -123,41 +123,41 @@
   <p:extLst>
     <p:ext uri="{521415D9-36F7-43E2-AB2F-B90AF26B5E84}">
       <p14:sectionLst xmlns:p14="http://schemas.microsoft.com/office/powerpoint/2010/main">
-        <p14:section name="Introduction" id="{13a6b8f2-8804-ff1f-ad14-686237c05e02}">
+        <p14:section name="Introduction" id="{5c08b441-d165-08d7-b6ed-a12f59ee069f}">
           <p14:sldIdLst>
             <p14:sldId id="256"/>
             <p14:sldId id="257"/>
             <p14:sldId id="258"/>
           </p14:sldIdLst>
         </p14:section>
-        <p14:section name="System" id="{8c251018-9530-1884-27d7-78f600df60c6}">
+        <p14:section name="System" id="{4318d8b8-03bb-fc2e-42ce-c31325e3cb27}">
           <p14:sldIdLst>
             <p14:sldId id="259"/>
             <p14:sldId id="260"/>
             <p14:sldId id="261"/>
           </p14:sldIdLst>
         </p14:section>
-        <p14:section name="Features" id="{5f791043-f0e4-666c-e8dc-e92f59ca3895}">
+        <p14:section name="Features" id="{19e7a173-9447-194a-43cc-20adf02acf86}">
           <p14:sldIdLst>
             <p14:sldId id="262"/>
             <p14:sldId id="263"/>
             <p14:sldId id="264"/>
           </p14:sldIdLst>
         </p14:section>
-        <p14:section name="Evaluation" id="{4fe09fbc-0421-ae5f-acd6-c72b56e47afc}">
+        <p14:section name="Evaluation" id="{afa56549-cb0d-36ec-e445-90b8eadd664d}">
           <p14:sldIdLst>
             <p14:sldId id="265"/>
             <p14:sldId id="266"/>
           </p14:sldIdLst>
         </p14:section>
-        <p14:section name="Syllabus" id="{b44831b3-a480-27c7-baf4-6a8bb6cfdd9d}">
+        <p14:section name="Syllabus" id="{0953e2cb-b671-3888-b8ac-732034e72e28}">
           <p14:sldIdLst>
             <p14:sldId id="267"/>
             <p14:sldId id="268"/>
             <p14:sldId id="269"/>
           </p14:sldIdLst>
         </p14:section>
-        <p14:section name="Wrap-up" id="{b4218203-4db6-5ce6-83a1-944bdfe43e67}">
+        <p14:section name="Wrap-up" id="{46a318d1-4bcf-5b70-5f04-0611afad1618}">
           <p14:sldIdLst>
             <p14:sldId id="270"/>
             <p14:sldId id="271"/>
@@ -7094,7 +7094,7 @@
                           <a:ea typeface="Calibri" pitchFamily="34" charset="-122"/>
                           <a:cs typeface="Calibri" pitchFamily="34" charset="-120"/>
                         </a:rPr>
-                        <a:t>Retrieval is search over a space of passages: Qdrant's HNSW index runs greedy best-first search on vector distance; BM25 and RRF rank and prune candidates to the top 15 / top 5.</a:t>
+                        <a:t>Retrieval is search over a space of passages: cosine and BM25 scores order the frontier, RRF fuses the rankings, and best-first pruning keeps 25 → 15 → 5 for the costly cross-encoder.</a:t>
                       </a:r>
                       <a:endParaRPr lang="en-US" sz="1000" dirty="0">
                         <a:latin typeface="Calibri" charset="0"/>
@@ -10108,7 +10108,7 @@
                   <a:schemeClr val="tx2"/>
                 </a:solidFill>
               </a:rPr>
-              <a:t>Best-first vector search, BM25 ranking, rank fusion and top-k pruning decide what the model is allowed to say.</a:t>
+              <a:t>Ranked vector and BM25 search, rank fusion and top-k pruning decide what the model is allowed to say.</a:t>
             </a:r>
             <a:endParaRPr lang="en-US" sz="1100" dirty="0"/>
           </a:p>

--- a/docs/presentation/Course_Notes_RAG_Demo.pptx
+++ b/docs/presentation/Course_Notes_RAG_Demo.pptx
@@ -123,41 +123,41 @@
   <p:extLst>
     <p:ext uri="{521415D9-36F7-43E2-AB2F-B90AF26B5E84}">
       <p14:sectionLst xmlns:p14="http://schemas.microsoft.com/office/powerpoint/2010/main">
-        <p14:section name="Introduction" id="{5c08b441-d165-08d7-b6ed-a12f59ee069f}">
+        <p14:section name="Introduction" id="{96899ddf-5e73-4781-52c9-72e18fab0e17}">
           <p14:sldIdLst>
             <p14:sldId id="256"/>
             <p14:sldId id="257"/>
             <p14:sldId id="258"/>
           </p14:sldIdLst>
         </p14:section>
-        <p14:section name="System" id="{4318d8b8-03bb-fc2e-42ce-c31325e3cb27}">
+        <p14:section name="System" id="{ade93ee2-7938-d4d2-c8a4-a345c031666c}">
           <p14:sldIdLst>
             <p14:sldId id="259"/>
             <p14:sldId id="260"/>
             <p14:sldId id="261"/>
           </p14:sldIdLst>
         </p14:section>
-        <p14:section name="Features" id="{19e7a173-9447-194a-43cc-20adf02acf86}">
+        <p14:section name="Features" id="{a58f8b2a-5999-766e-9371-eeb4266393cc}">
           <p14:sldIdLst>
             <p14:sldId id="262"/>
             <p14:sldId id="263"/>
             <p14:sldId id="264"/>
           </p14:sldIdLst>
         </p14:section>
-        <p14:section name="Evaluation" id="{afa56549-cb0d-36ec-e445-90b8eadd664d}">
+        <p14:section name="Evaluation" id="{001a4ed0-191d-ff1b-80ec-31f21432061b}">
           <p14:sldIdLst>
             <p14:sldId id="265"/>
             <p14:sldId id="266"/>
           </p14:sldIdLst>
         </p14:section>
-        <p14:section name="Syllabus" id="{0953e2cb-b671-3888-b8ac-732034e72e28}">
+        <p14:section name="Syllabus" id="{13344263-94ed-8ea5-c9e6-6d7c5a9086ac}">
           <p14:sldIdLst>
             <p14:sldId id="267"/>
             <p14:sldId id="268"/>
             <p14:sldId id="269"/>
           </p14:sldIdLst>
         </p14:section>
-        <p14:section name="Wrap-up" id="{46a318d1-4bcf-5b70-5f04-0611afad1618}">
+        <p14:section name="Wrap-up" id="{c2171ead-4262-c449-8262-f63da56d4136}">
           <p14:sldIdLst>
             <p14:sldId id="270"/>
             <p14:sldId id="271"/>
@@ -3744,7 +3744,7 @@
                   <a:schemeClr val="bg1"/>
                 </a:solidFill>
               </a:rPr>
-              <a:t>Pranali Kamisetty ([Registration Number])</a:t>
+              <a:t>Pranali Kamisetty (24BDS0326)</a:t>
             </a:r>
             <a:endParaRPr lang="en-US" sz="1100" dirty="0"/>
           </a:p>
@@ -11739,7 +11739,7 @@
                   <a:schemeClr val="bg1"/>
                 </a:solidFill>
               </a:rPr>
-              <a:t>Royce B Selvaraj (24BCB0078)  ·  Srujan Buddharaju (24BDS0347)  ·  Pranali Kamisetty ([Registration Number])</a:t>
+              <a:t>Royce B Selvaraj (24BCB0078)  ·  Srujan Buddharaju (24BDS0347)  ·  Pranali Kamisetty (24BDS0326)</a:t>
             </a:r>
             <a:endParaRPr lang="en-US" sz="1200" dirty="0"/>
           </a:p>
